--- a/17 18 20/2 Tableau/6.Data Modeling/Data Modeling .pptx
+++ b/17 18 20/2 Tableau/6.Data Modeling/Data Modeling .pptx
@@ -5,11 +5,13 @@
     <p:sldMasterId id="2147483660" r:id="rId1"/>
   </p:sldMasterIdLst>
   <p:notesMasterIdLst>
-    <p:notesMasterId r:id="rId4"/>
+    <p:notesMasterId r:id="rId6"/>
   </p:notesMasterIdLst>
   <p:sldIdLst>
     <p:sldId id="274" r:id="rId2"/>
     <p:sldId id="275" r:id="rId3"/>
+    <p:sldId id="277" r:id="rId4"/>
+    <p:sldId id="276" r:id="rId5"/>
   </p:sldIdLst>
   <p:sldSz cx="12192000" cy="6858000"/>
   <p:notesSz cx="6858000" cy="9144000"/>
@@ -198,7 +200,7 @@
           <a:p>
             <a:fld id="{B17773B0-9C71-4C42-839B-CED3341CD232}" type="datetimeFigureOut">
               <a:rPr lang="en-IN" smtClean="0"/>
-              <a:t>28-07-2026</a:t>
+              <a:t>30-07-2026</a:t>
             </a:fld>
             <a:endParaRPr lang="en-IN"/>
           </a:p>
@@ -652,7 +654,7 @@
           <a:p>
             <a:fld id="{DC8321A5-74C1-4574-A6AA-F1EDDDF12D9F}" type="datetimeFigureOut">
               <a:rPr lang="en-IN" smtClean="0"/>
-              <a:t>28-07-2026</a:t>
+              <a:t>30-07-2026</a:t>
             </a:fld>
             <a:endParaRPr lang="en-IN"/>
           </a:p>
@@ -927,7 +929,7 @@
           <a:p>
             <a:fld id="{DC8321A5-74C1-4574-A6AA-F1EDDDF12D9F}" type="datetimeFigureOut">
               <a:rPr lang="en-IN" smtClean="0"/>
-              <a:t>28-07-2026</a:t>
+              <a:t>30-07-2026</a:t>
             </a:fld>
             <a:endParaRPr lang="en-IN"/>
           </a:p>
@@ -1121,7 +1123,7 @@
           <a:p>
             <a:fld id="{DC8321A5-74C1-4574-A6AA-F1EDDDF12D9F}" type="datetimeFigureOut">
               <a:rPr lang="en-IN" smtClean="0"/>
-              <a:t>28-07-2026</a:t>
+              <a:t>30-07-2026</a:t>
             </a:fld>
             <a:endParaRPr lang="en-IN"/>
           </a:p>
@@ -1394,7 +1396,7 @@
           <a:p>
             <a:fld id="{DC8321A5-74C1-4574-A6AA-F1EDDDF12D9F}" type="datetimeFigureOut">
               <a:rPr lang="en-IN" smtClean="0"/>
-              <a:t>28-07-2026</a:t>
+              <a:t>30-07-2026</a:t>
             </a:fld>
             <a:endParaRPr lang="en-IN"/>
           </a:p>
@@ -1735,7 +1737,7 @@
           <a:p>
             <a:fld id="{DC8321A5-74C1-4574-A6AA-F1EDDDF12D9F}" type="datetimeFigureOut">
               <a:rPr lang="en-IN" smtClean="0"/>
-              <a:t>28-07-2026</a:t>
+              <a:t>30-07-2026</a:t>
             </a:fld>
             <a:endParaRPr lang="en-IN"/>
           </a:p>
@@ -2358,7 +2360,7 @@
           <a:p>
             <a:fld id="{DC8321A5-74C1-4574-A6AA-F1EDDDF12D9F}" type="datetimeFigureOut">
               <a:rPr lang="en-IN" smtClean="0"/>
-              <a:t>28-07-2026</a:t>
+              <a:t>30-07-2026</a:t>
             </a:fld>
             <a:endParaRPr lang="en-IN"/>
           </a:p>
@@ -3218,7 +3220,7 @@
           <a:p>
             <a:fld id="{DC8321A5-74C1-4574-A6AA-F1EDDDF12D9F}" type="datetimeFigureOut">
               <a:rPr lang="en-IN" smtClean="0"/>
-              <a:t>28-07-2026</a:t>
+              <a:t>30-07-2026</a:t>
             </a:fld>
             <a:endParaRPr lang="en-IN"/>
           </a:p>
@@ -3388,7 +3390,7 @@
           <a:p>
             <a:fld id="{DC8321A5-74C1-4574-A6AA-F1EDDDF12D9F}" type="datetimeFigureOut">
               <a:rPr lang="en-IN" smtClean="0"/>
-              <a:t>28-07-2026</a:t>
+              <a:t>30-07-2026</a:t>
             </a:fld>
             <a:endParaRPr lang="en-IN"/>
           </a:p>
@@ -3568,7 +3570,7 @@
           <a:p>
             <a:fld id="{DC8321A5-74C1-4574-A6AA-F1EDDDF12D9F}" type="datetimeFigureOut">
               <a:rPr lang="en-IN" smtClean="0"/>
-              <a:t>28-07-2026</a:t>
+              <a:t>30-07-2026</a:t>
             </a:fld>
             <a:endParaRPr lang="en-IN"/>
           </a:p>
@@ -3738,7 +3740,7 @@
           <a:p>
             <a:fld id="{DC8321A5-74C1-4574-A6AA-F1EDDDF12D9F}" type="datetimeFigureOut">
               <a:rPr lang="en-IN" smtClean="0"/>
-              <a:t>28-07-2026</a:t>
+              <a:t>30-07-2026</a:t>
             </a:fld>
             <a:endParaRPr lang="en-IN"/>
           </a:p>
@@ -3985,7 +3987,7 @@
           <a:p>
             <a:fld id="{DC8321A5-74C1-4574-A6AA-F1EDDDF12D9F}" type="datetimeFigureOut">
               <a:rPr lang="en-IN" smtClean="0"/>
-              <a:t>28-07-2026</a:t>
+              <a:t>30-07-2026</a:t>
             </a:fld>
             <a:endParaRPr lang="en-IN"/>
           </a:p>
@@ -4277,7 +4279,7 @@
           <a:p>
             <a:fld id="{DC8321A5-74C1-4574-A6AA-F1EDDDF12D9F}" type="datetimeFigureOut">
               <a:rPr lang="en-IN" smtClean="0"/>
-              <a:t>28-07-2026</a:t>
+              <a:t>30-07-2026</a:t>
             </a:fld>
             <a:endParaRPr lang="en-IN"/>
           </a:p>
@@ -4721,7 +4723,7 @@
           <a:p>
             <a:fld id="{DC8321A5-74C1-4574-A6AA-F1EDDDF12D9F}" type="datetimeFigureOut">
               <a:rPr lang="en-IN" smtClean="0"/>
-              <a:t>28-07-2026</a:t>
+              <a:t>30-07-2026</a:t>
             </a:fld>
             <a:endParaRPr lang="en-IN"/>
           </a:p>
@@ -4839,7 +4841,7 @@
           <a:p>
             <a:fld id="{DC8321A5-74C1-4574-A6AA-F1EDDDF12D9F}" type="datetimeFigureOut">
               <a:rPr lang="en-IN" smtClean="0"/>
-              <a:t>28-07-2026</a:t>
+              <a:t>30-07-2026</a:t>
             </a:fld>
             <a:endParaRPr lang="en-IN"/>
           </a:p>
@@ -4934,7 +4936,7 @@
           <a:p>
             <a:fld id="{DC8321A5-74C1-4574-A6AA-F1EDDDF12D9F}" type="datetimeFigureOut">
               <a:rPr lang="en-IN" smtClean="0"/>
-              <a:t>28-07-2026</a:t>
+              <a:t>30-07-2026</a:t>
             </a:fld>
             <a:endParaRPr lang="en-IN"/>
           </a:p>
@@ -5213,7 +5215,7 @@
           <a:p>
             <a:fld id="{DC8321A5-74C1-4574-A6AA-F1EDDDF12D9F}" type="datetimeFigureOut">
               <a:rPr lang="en-IN" smtClean="0"/>
-              <a:t>28-07-2026</a:t>
+              <a:t>30-07-2026</a:t>
             </a:fld>
             <a:endParaRPr lang="en-IN"/>
           </a:p>
@@ -5488,7 +5490,7 @@
           <a:p>
             <a:fld id="{DC8321A5-74C1-4574-A6AA-F1EDDDF12D9F}" type="datetimeFigureOut">
               <a:rPr lang="en-IN" smtClean="0"/>
-              <a:t>28-07-2026</a:t>
+              <a:t>30-07-2026</a:t>
             </a:fld>
             <a:endParaRPr lang="en-IN"/>
           </a:p>
@@ -5917,7 +5919,7 @@
           <a:p>
             <a:fld id="{DC8321A5-74C1-4574-A6AA-F1EDDDF12D9F}" type="datetimeFigureOut">
               <a:rPr lang="en-IN" smtClean="0"/>
-              <a:t>28-07-2026</a:t>
+              <a:t>30-07-2026</a:t>
             </a:fld>
             <a:endParaRPr lang="en-IN"/>
           </a:p>
@@ -6527,17 +6529,8 @@
               <a:rPr lang="en-US" dirty="0" smtClean="0">
                 <a:latin typeface="Candara" panose="020E0502030303020204" pitchFamily="34" charset="0"/>
               </a:rPr>
-              <a:t>One to </a:t>
-            </a:r>
-            <a:r>
-              <a:rPr lang="en-US" dirty="0" smtClean="0">
-                <a:latin typeface="Candara" panose="020E0502030303020204" pitchFamily="34" charset="0"/>
-              </a:rPr>
-              <a:t>One</a:t>
-            </a:r>
-            <a:endParaRPr lang="en-US" dirty="0" smtClean="0">
-              <a:latin typeface="Candara" panose="020E0502030303020204" pitchFamily="34" charset="0"/>
-            </a:endParaRPr>
+              <a:t>One to One</a:t>
+            </a:r>
           </a:p>
         </p:txBody>
       </p:sp>
@@ -7053,6 +7046,281 @@
       <p:bldP spid="3" grpId="0"/>
     </p:bldLst>
   </p:timing>
+</p:sld>
+</file>
+
+<file path=ppt/slides/slide3.xml><?xml version="1.0" encoding="utf-8"?>
+<p:sld xmlns:a="http://schemas.openxmlformats.org/drawingml/2006/main" xmlns:r="http://schemas.openxmlformats.org/officeDocument/2006/relationships" xmlns:p="http://schemas.openxmlformats.org/presentationml/2006/main">
+  <p:cSld>
+    <p:spTree>
+      <p:nvGrpSpPr>
+        <p:cNvPr id="1" name=""/>
+        <p:cNvGrpSpPr/>
+        <p:nvPr/>
+      </p:nvGrpSpPr>
+      <p:grpSpPr>
+        <a:xfrm>
+          <a:off x="0" y="0"/>
+          <a:ext cx="0" cy="0"/>
+          <a:chOff x="0" y="0"/>
+          <a:chExt cx="0" cy="0"/>
+        </a:xfrm>
+      </p:grpSpPr>
+      <p:sp>
+        <p:nvSpPr>
+          <p:cNvPr id="2" name="Title 1"/>
+          <p:cNvSpPr>
+            <a:spLocks noGrp="1"/>
+          </p:cNvSpPr>
+          <p:nvPr>
+            <p:ph type="title"/>
+          </p:nvPr>
+        </p:nvSpPr>
+        <p:spPr>
+          <a:xfrm>
+            <a:off x="646111" y="452717"/>
+            <a:ext cx="9404723" cy="4287233"/>
+          </a:xfrm>
+        </p:spPr>
+        <p:txBody>
+          <a:bodyPr/>
+          <a:lstStyle/>
+          <a:p>
+            <a:r>
+              <a:rPr lang="en-US" sz="2000" b="1" dirty="0" smtClean="0"/>
+              <a:t>Joins VS Relationships</a:t>
+            </a:r>
+            <a:r>
+              <a:rPr lang="en-US" sz="2000" dirty="0" smtClean="0"/>
+              <a:t> </a:t>
+            </a:r>
+            <a:br>
+              <a:rPr lang="en-US" sz="2000" dirty="0" smtClean="0"/>
+            </a:br>
+            <a:r>
+              <a:rPr lang="en-US" sz="2000" dirty="0" smtClean="0"/>
+              <a:t/>
+            </a:r>
+            <a:br>
+              <a:rPr lang="en-US" sz="2000" dirty="0" smtClean="0"/>
+            </a:br>
+            <a:r>
+              <a:rPr lang="en-US" sz="2000" b="1" dirty="0" err="1" smtClean="0"/>
+              <a:t>Relationships</a:t>
+            </a:r>
+            <a:r>
+              <a:rPr lang="en-US" sz="2000" dirty="0" smtClean="0"/>
+              <a:t> are </a:t>
+            </a:r>
+            <a:r>
+              <a:rPr lang="en-US" sz="2000" dirty="0"/>
+              <a:t>logical links between tables where Tableau combines data dynamically </a:t>
+            </a:r>
+            <a:r>
+              <a:rPr lang="en-US" sz="2400" b="1" dirty="0">
+                <a:solidFill>
+                  <a:srgbClr val="00B050"/>
+                </a:solidFill>
+              </a:rPr>
+              <a:t>at query time, preserving each table's level of detail </a:t>
+            </a:r>
+            <a:r>
+              <a:rPr lang="en-US" sz="2000" dirty="0"/>
+              <a:t>and reducing duplication. </a:t>
+            </a:r>
+            <a:r>
+              <a:rPr lang="en-US" sz="2000" dirty="0" smtClean="0"/>
+              <a:t/>
+            </a:r>
+            <a:br>
+              <a:rPr lang="en-US" sz="2000" dirty="0" smtClean="0"/>
+            </a:br>
+            <a:r>
+              <a:rPr lang="en-US" sz="2000" dirty="0"/>
+              <a:t/>
+            </a:r>
+            <a:br>
+              <a:rPr lang="en-US" sz="2000" dirty="0"/>
+            </a:br>
+            <a:r>
+              <a:rPr lang="en-US" sz="2000" b="1" dirty="0" smtClean="0"/>
+              <a:t>Joins</a:t>
+            </a:r>
+            <a:r>
+              <a:rPr lang="en-US" sz="2000" dirty="0" smtClean="0"/>
+              <a:t> </a:t>
+            </a:r>
+            <a:r>
+              <a:rPr lang="en-US" sz="2400" b="1" dirty="0">
+                <a:solidFill>
+                  <a:srgbClr val="00B050"/>
+                </a:solidFill>
+              </a:rPr>
+              <a:t>physically merge tables</a:t>
+            </a:r>
+            <a:r>
+              <a:rPr lang="en-US" sz="2000" dirty="0"/>
+              <a:t> into one table before analysis, </a:t>
+            </a:r>
+            <a:r>
+              <a:rPr lang="en-US" sz="2000" dirty="0" smtClean="0"/>
+              <a:t/>
+            </a:r>
+            <a:br>
+              <a:rPr lang="en-US" sz="2000" dirty="0" smtClean="0"/>
+            </a:br>
+            <a:r>
+              <a:rPr lang="en-US" sz="2000" dirty="0" smtClean="0"/>
+              <a:t/>
+            </a:r>
+            <a:br>
+              <a:rPr lang="en-US" sz="2000" dirty="0" smtClean="0"/>
+            </a:br>
+            <a:r>
+              <a:rPr lang="en-US" sz="2000" dirty="0"/>
+              <a:t/>
+            </a:r>
+            <a:br>
+              <a:rPr lang="en-US" sz="2000" dirty="0"/>
+            </a:br>
+            <a:r>
+              <a:rPr lang="en-US" sz="2000" dirty="0" smtClean="0"/>
+              <a:t>Tableau </a:t>
+            </a:r>
+            <a:r>
+              <a:rPr lang="en-US" sz="2000" dirty="0"/>
+              <a:t>generally recommends using </a:t>
+            </a:r>
+            <a:r>
+              <a:rPr lang="en-US" sz="2000" b="1" dirty="0"/>
+              <a:t>relationships</a:t>
+            </a:r>
+            <a:r>
+              <a:rPr lang="en-US" sz="2000" dirty="0"/>
+              <a:t> unless a specific use case requires a join.</a:t>
+            </a:r>
+            <a:endParaRPr lang="en-IN" sz="2000" dirty="0"/>
+          </a:p>
+        </p:txBody>
+      </p:sp>
+    </p:spTree>
+    <p:extLst>
+      <p:ext uri="{BB962C8B-B14F-4D97-AF65-F5344CB8AC3E}">
+        <p14:creationId xmlns:p14="http://schemas.microsoft.com/office/powerpoint/2010/main" val="382887410"/>
+      </p:ext>
+    </p:extLst>
+  </p:cSld>
+  <p:clrMapOvr>
+    <a:masterClrMapping/>
+  </p:clrMapOvr>
+</p:sld>
+</file>
+
+<file path=ppt/slides/slide4.xml><?xml version="1.0" encoding="utf-8"?>
+<p:sld xmlns:a="http://schemas.openxmlformats.org/drawingml/2006/main" xmlns:r="http://schemas.openxmlformats.org/officeDocument/2006/relationships" xmlns:p="http://schemas.openxmlformats.org/presentationml/2006/main">
+  <p:cSld>
+    <p:spTree>
+      <p:nvGrpSpPr>
+        <p:cNvPr id="1" name=""/>
+        <p:cNvGrpSpPr/>
+        <p:nvPr/>
+      </p:nvGrpSpPr>
+      <p:grpSpPr>
+        <a:xfrm>
+          <a:off x="0" y="0"/>
+          <a:ext cx="0" cy="0"/>
+          <a:chOff x="0" y="0"/>
+          <a:chExt cx="0" cy="0"/>
+        </a:xfrm>
+      </p:grpSpPr>
+      <p:sp>
+        <p:nvSpPr>
+          <p:cNvPr id="4" name="Rectangle 3"/>
+          <p:cNvSpPr/>
+          <p:nvPr/>
+        </p:nvSpPr>
+        <p:spPr>
+          <a:xfrm>
+            <a:off x="696685" y="552167"/>
+            <a:ext cx="9492344" cy="1015663"/>
+          </a:xfrm>
+          <a:prstGeom prst="rect">
+            <a:avLst/>
+          </a:prstGeom>
+        </p:spPr>
+        <p:txBody>
+          <a:bodyPr wrap="square">
+            <a:spAutoFit/>
+          </a:bodyPr>
+          <a:lstStyle/>
+          <a:p>
+            <a:r>
+              <a:rPr lang="en-US" dirty="0"/>
+              <a:t>Data blending in Tableau is the process of combining data from multiple data sources by matching a </a:t>
+            </a:r>
+            <a:r>
+              <a:rPr lang="en-US" sz="2400" b="1" dirty="0"/>
+              <a:t>common field,</a:t>
+            </a:r>
+            <a:r>
+              <a:rPr lang="en-US" dirty="0"/>
+              <a:t> so you can analyze them together in a single visualization.</a:t>
+            </a:r>
+            <a:endParaRPr lang="en-IN" dirty="0"/>
+          </a:p>
+        </p:txBody>
+      </p:sp>
+      <p:pic>
+        <p:nvPicPr>
+          <p:cNvPr id="1026" name="Picture 2" descr="Premier Insta Nutri Blender 400W with 2 Jar - NB7643"/>
+          <p:cNvPicPr>
+            <a:picLocks noChangeAspect="1" noChangeArrowheads="1"/>
+          </p:cNvPicPr>
+          <p:nvPr/>
+        </p:nvPicPr>
+        <p:blipFill>
+          <a:blip r:embed="rId2">
+            <a:extLst>
+              <a:ext uri="{28A0092B-C50C-407E-A947-70E740481C1C}">
+                <a14:useLocalDpi xmlns:a14="http://schemas.microsoft.com/office/drawing/2010/main" val="0"/>
+              </a:ext>
+            </a:extLst>
+          </a:blip>
+          <a:srcRect/>
+          <a:stretch>
+            <a:fillRect/>
+          </a:stretch>
+        </p:blipFill>
+        <p:spPr bwMode="auto">
+          <a:xfrm>
+            <a:off x="3069771" y="2223438"/>
+            <a:ext cx="4032834" cy="4032835"/>
+          </a:xfrm>
+          <a:prstGeom prst="rect">
+            <a:avLst/>
+          </a:prstGeom>
+          <a:noFill/>
+          <a:extLst>
+            <a:ext uri="{909E8E84-426E-40DD-AFC4-6F175D3DCCD1}">
+              <a14:hiddenFill xmlns:a14="http://schemas.microsoft.com/office/drawing/2010/main">
+                <a:solidFill>
+                  <a:srgbClr val="FFFFFF"/>
+                </a:solidFill>
+              </a14:hiddenFill>
+            </a:ext>
+          </a:extLst>
+        </p:spPr>
+      </p:pic>
+    </p:spTree>
+    <p:extLst>
+      <p:ext uri="{BB962C8B-B14F-4D97-AF65-F5344CB8AC3E}">
+        <p14:creationId xmlns:p14="http://schemas.microsoft.com/office/powerpoint/2010/main" val="227701508"/>
+      </p:ext>
+    </p:extLst>
+  </p:cSld>
+  <p:clrMapOvr>
+    <a:masterClrMapping/>
+  </p:clrMapOvr>
 </p:sld>
 </file>
 
